--- a/class/cloud_infra_mgmt/12주차_Jenkins_CICD심화/01_강의자료/1차시_DeclarativePipeline문법.pptx
+++ b/class/cloud_infra_mgmt/12주차_Jenkins_CICD심화/01_강의자료/1차시_DeclarativePipeline문법.pptx
@@ -9397,7 +9397,7 @@
               </a:lnSpc>
             </a:pPr>
             <a:r>
-              <a:rPr sz="1500" b="1">
+              <a:rPr sz="1700" b="1">
                 <a:solidFill>
                   <a:srgbClr val="0D9488"/>
                 </a:solidFill>
@@ -9406,7 +9406,7 @@
               <a:t>●  </a:t>
             </a:r>
             <a:r>
-              <a:rPr sz="1500" b="0">
+              <a:rPr sz="1700" b="0">
                 <a:solidFill>
                   <a:srgbClr val="222733"/>
                 </a:solidFill>
@@ -9422,7 +9422,7 @@
               </a:lnSpc>
             </a:pPr>
             <a:r>
-              <a:rPr sz="1500" b="1">
+              <a:rPr sz="1700" b="1">
                 <a:solidFill>
                   <a:srgbClr val="0D9488"/>
                 </a:solidFill>
@@ -9431,7 +9431,7 @@
               <a:t>●  </a:t>
             </a:r>
             <a:r>
-              <a:rPr sz="1500" b="0">
+              <a:rPr sz="1700" b="0">
                 <a:solidFill>
                   <a:srgbClr val="222733"/>
                 </a:solidFill>
@@ -9447,7 +9447,7 @@
               </a:lnSpc>
             </a:pPr>
             <a:r>
-              <a:rPr sz="1500" b="1">
+              <a:rPr sz="1700" b="1">
                 <a:solidFill>
                   <a:srgbClr val="0D9488"/>
                 </a:solidFill>
@@ -9456,7 +9456,7 @@
               <a:t>●  </a:t>
             </a:r>
             <a:r>
-              <a:rPr sz="1500" b="0">
+              <a:rPr sz="1700" b="0">
                 <a:solidFill>
                   <a:srgbClr val="222733"/>
                 </a:solidFill>

--- a/class/cloud_infra_mgmt/12주차_Jenkins_CICD심화/01_강의자료/1차시_DeclarativePipeline문법.pptx
+++ b/class/cloud_infra_mgmt/12주차_Jenkins_CICD심화/01_강의자료/1차시_DeclarativePipeline문법.pptx
@@ -5251,7 +5251,7 @@
           <a:p>
             <a:pPr>
               <a:lnSpc>
-                <a:spcPct val="115000"/>
+                <a:spcPct val="149500"/>
               </a:lnSpc>
             </a:pPr>
             <a:r>
@@ -5276,7 +5276,7 @@
           <a:p>
             <a:pPr>
               <a:lnSpc>
-                <a:spcPct val="115000"/>
+                <a:spcPct val="149500"/>
               </a:lnSpc>
             </a:pPr>
             <a:r>
@@ -5301,7 +5301,7 @@
           <a:p>
             <a:pPr>
               <a:lnSpc>
-                <a:spcPct val="115000"/>
+                <a:spcPct val="149500"/>
               </a:lnSpc>
             </a:pPr>
             <a:r>
@@ -5692,7 +5692,7 @@
           <a:p>
             <a:pPr>
               <a:lnSpc>
-                <a:spcPct val="115000"/>
+                <a:spcPct val="149500"/>
               </a:lnSpc>
             </a:pPr>
             <a:r>
@@ -5717,7 +5717,7 @@
           <a:p>
             <a:pPr>
               <a:lnSpc>
-                <a:spcPct val="115000"/>
+                <a:spcPct val="149500"/>
               </a:lnSpc>
             </a:pPr>
             <a:r>
@@ -5742,7 +5742,7 @@
           <a:p>
             <a:pPr>
               <a:lnSpc>
-                <a:spcPct val="115000"/>
+                <a:spcPct val="149500"/>
               </a:lnSpc>
             </a:pPr>
             <a:r>
@@ -6991,16 +6991,104 @@
       </p:sp>
       <p:sp>
         <p:nvSpPr>
-          <p:cNvPr id="7" name="Isosceles Triangle 6"/>
+          <p:cNvPr id="7" name="Rectangle 6"/>
           <p:cNvSpPr/>
           <p:nvPr/>
         </p:nvSpPr>
         <p:spPr>
-          <a:xfrm rot="5400000">
-            <a:off x="3495751" y="1673352"/>
-            <a:ext cx="146304" cy="146304"/>
-          </a:xfrm>
-          <a:prstGeom prst="triangle">
+          <a:xfrm>
+            <a:off x="5096865" y="1730959"/>
+            <a:ext cx="1995220" cy="31089"/>
+          </a:xfrm>
+          <a:prstGeom prst="rect">
+            <a:avLst/>
+          </a:prstGeom>
+          <a:solidFill>
+            <a:srgbClr val="14B8A6"/>
+          </a:solidFill>
+          <a:ln>
+            <a:noFill/>
+          </a:ln>
+          <a:effectLst/>
+        </p:spPr>
+        <p:style>
+          <a:lnRef idx="1">
+            <a:schemeClr val="accent1"/>
+          </a:lnRef>
+          <a:fillRef idx="3">
+            <a:schemeClr val="accent1"/>
+          </a:fillRef>
+          <a:effectRef idx="2">
+            <a:schemeClr val="accent1"/>
+          </a:effectRef>
+          <a:fontRef idx="minor">
+            <a:schemeClr val="lt1"/>
+          </a:fontRef>
+        </p:style>
+        <p:txBody>
+          <a:bodyPr rtlCol="0" anchor="ctr"/>
+          <a:lstStyle/>
+          <a:p>
+            <a:pPr algn="ctr"/>
+          </a:p>
+        </p:txBody>
+      </p:sp>
+      <p:sp>
+        <p:nvSpPr>
+          <p:cNvPr id="8" name="Rectangle 7"/>
+          <p:cNvSpPr/>
+          <p:nvPr/>
+        </p:nvSpPr>
+        <p:spPr>
+          <a:xfrm>
+            <a:off x="7622438" y="1730959"/>
+            <a:ext cx="1995220" cy="31089"/>
+          </a:xfrm>
+          <a:prstGeom prst="rect">
+            <a:avLst/>
+          </a:prstGeom>
+          <a:solidFill>
+            <a:srgbClr val="14B8A6"/>
+          </a:solidFill>
+          <a:ln>
+            <a:noFill/>
+          </a:ln>
+          <a:effectLst/>
+        </p:spPr>
+        <p:style>
+          <a:lnRef idx="1">
+            <a:schemeClr val="accent1"/>
+          </a:lnRef>
+          <a:fillRef idx="3">
+            <a:schemeClr val="accent1"/>
+          </a:fillRef>
+          <a:effectRef idx="2">
+            <a:schemeClr val="accent1"/>
+          </a:effectRef>
+          <a:fontRef idx="minor">
+            <a:schemeClr val="lt1"/>
+          </a:fontRef>
+        </p:style>
+        <p:txBody>
+          <a:bodyPr rtlCol="0" anchor="ctr"/>
+          <a:lstStyle/>
+          <a:p>
+            <a:pPr algn="ctr"/>
+          </a:p>
+        </p:txBody>
+      </p:sp>
+      <p:sp>
+        <p:nvSpPr>
+          <p:cNvPr id="9" name="Oval 8"/>
+          <p:cNvSpPr/>
+          <p:nvPr/>
+        </p:nvSpPr>
+        <p:spPr>
+          <a:xfrm>
+            <a:off x="2040940" y="1481328"/>
+            <a:ext cx="530352" cy="530352"/>
+          </a:xfrm>
+          <a:prstGeom prst="ellipse">
             <a:avLst/>
           </a:prstGeom>
           <a:solidFill>
@@ -7035,227 +7123,7 @@
       </p:sp>
       <p:sp>
         <p:nvSpPr>
-          <p:cNvPr id="8" name="Rectangle 7"/>
-          <p:cNvSpPr/>
-          <p:nvPr/>
-        </p:nvSpPr>
-        <p:spPr>
-          <a:xfrm>
-            <a:off x="5096865" y="1730959"/>
-            <a:ext cx="1995220" cy="31089"/>
-          </a:xfrm>
-          <a:prstGeom prst="rect">
-            <a:avLst/>
-          </a:prstGeom>
-          <a:solidFill>
-            <a:srgbClr val="14B8A6"/>
-          </a:solidFill>
-          <a:ln>
-            <a:noFill/>
-          </a:ln>
-          <a:effectLst/>
-        </p:spPr>
-        <p:style>
-          <a:lnRef idx="1">
-            <a:schemeClr val="accent1"/>
-          </a:lnRef>
-          <a:fillRef idx="3">
-            <a:schemeClr val="accent1"/>
-          </a:fillRef>
-          <a:effectRef idx="2">
-            <a:schemeClr val="accent1"/>
-          </a:effectRef>
-          <a:fontRef idx="minor">
-            <a:schemeClr val="lt1"/>
-          </a:fontRef>
-        </p:style>
-        <p:txBody>
-          <a:bodyPr rtlCol="0" anchor="ctr"/>
-          <a:lstStyle/>
-          <a:p>
-            <a:pPr algn="ctr"/>
-          </a:p>
-        </p:txBody>
-      </p:sp>
-      <p:sp>
-        <p:nvSpPr>
-          <p:cNvPr id="9" name="Isosceles Triangle 8"/>
-          <p:cNvSpPr/>
-          <p:nvPr/>
-        </p:nvSpPr>
-        <p:spPr>
-          <a:xfrm rot="5400000">
-            <a:off x="6021324" y="1673352"/>
-            <a:ext cx="146304" cy="146304"/>
-          </a:xfrm>
-          <a:prstGeom prst="triangle">
-            <a:avLst/>
-          </a:prstGeom>
-          <a:solidFill>
-            <a:srgbClr val="0D9488"/>
-          </a:solidFill>
-          <a:ln>
-            <a:noFill/>
-          </a:ln>
-          <a:effectLst/>
-        </p:spPr>
-        <p:style>
-          <a:lnRef idx="1">
-            <a:schemeClr val="accent1"/>
-          </a:lnRef>
-          <a:fillRef idx="3">
-            <a:schemeClr val="accent1"/>
-          </a:fillRef>
-          <a:effectRef idx="2">
-            <a:schemeClr val="accent1"/>
-          </a:effectRef>
-          <a:fontRef idx="minor">
-            <a:schemeClr val="lt1"/>
-          </a:fontRef>
-        </p:style>
-        <p:txBody>
-          <a:bodyPr rtlCol="0" anchor="ctr"/>
-          <a:lstStyle/>
-          <a:p>
-            <a:pPr algn="ctr"/>
-          </a:p>
-        </p:txBody>
-      </p:sp>
-      <p:sp>
-        <p:nvSpPr>
-          <p:cNvPr id="10" name="Rectangle 9"/>
-          <p:cNvSpPr/>
-          <p:nvPr/>
-        </p:nvSpPr>
-        <p:spPr>
-          <a:xfrm>
-            <a:off x="7622438" y="1730959"/>
-            <a:ext cx="1995220" cy="31089"/>
-          </a:xfrm>
-          <a:prstGeom prst="rect">
-            <a:avLst/>
-          </a:prstGeom>
-          <a:solidFill>
-            <a:srgbClr val="14B8A6"/>
-          </a:solidFill>
-          <a:ln>
-            <a:noFill/>
-          </a:ln>
-          <a:effectLst/>
-        </p:spPr>
-        <p:style>
-          <a:lnRef idx="1">
-            <a:schemeClr val="accent1"/>
-          </a:lnRef>
-          <a:fillRef idx="3">
-            <a:schemeClr val="accent1"/>
-          </a:fillRef>
-          <a:effectRef idx="2">
-            <a:schemeClr val="accent1"/>
-          </a:effectRef>
-          <a:fontRef idx="minor">
-            <a:schemeClr val="lt1"/>
-          </a:fontRef>
-        </p:style>
-        <p:txBody>
-          <a:bodyPr rtlCol="0" anchor="ctr"/>
-          <a:lstStyle/>
-          <a:p>
-            <a:pPr algn="ctr"/>
-          </a:p>
-        </p:txBody>
-      </p:sp>
-      <p:sp>
-        <p:nvSpPr>
-          <p:cNvPr id="11" name="Isosceles Triangle 10"/>
-          <p:cNvSpPr/>
-          <p:nvPr/>
-        </p:nvSpPr>
-        <p:spPr>
-          <a:xfrm rot="5400000">
-            <a:off x="8546896" y="1673352"/>
-            <a:ext cx="146304" cy="146304"/>
-          </a:xfrm>
-          <a:prstGeom prst="triangle">
-            <a:avLst/>
-          </a:prstGeom>
-          <a:solidFill>
-            <a:srgbClr val="0D9488"/>
-          </a:solidFill>
-          <a:ln>
-            <a:noFill/>
-          </a:ln>
-          <a:effectLst/>
-        </p:spPr>
-        <p:style>
-          <a:lnRef idx="1">
-            <a:schemeClr val="accent1"/>
-          </a:lnRef>
-          <a:fillRef idx="3">
-            <a:schemeClr val="accent1"/>
-          </a:fillRef>
-          <a:effectRef idx="2">
-            <a:schemeClr val="accent1"/>
-          </a:effectRef>
-          <a:fontRef idx="minor">
-            <a:schemeClr val="lt1"/>
-          </a:fontRef>
-        </p:style>
-        <p:txBody>
-          <a:bodyPr rtlCol="0" anchor="ctr"/>
-          <a:lstStyle/>
-          <a:p>
-            <a:pPr algn="ctr"/>
-          </a:p>
-        </p:txBody>
-      </p:sp>
-      <p:sp>
-        <p:nvSpPr>
-          <p:cNvPr id="12" name="Oval 11"/>
-          <p:cNvSpPr/>
-          <p:nvPr/>
-        </p:nvSpPr>
-        <p:spPr>
-          <a:xfrm>
-            <a:off x="2040940" y="1481328"/>
-            <a:ext cx="530352" cy="530352"/>
-          </a:xfrm>
-          <a:prstGeom prst="ellipse">
-            <a:avLst/>
-          </a:prstGeom>
-          <a:solidFill>
-            <a:srgbClr val="0D9488"/>
-          </a:solidFill>
-          <a:ln>
-            <a:noFill/>
-          </a:ln>
-          <a:effectLst/>
-        </p:spPr>
-        <p:style>
-          <a:lnRef idx="1">
-            <a:schemeClr val="accent1"/>
-          </a:lnRef>
-          <a:fillRef idx="3">
-            <a:schemeClr val="accent1"/>
-          </a:fillRef>
-          <a:effectRef idx="2">
-            <a:schemeClr val="accent1"/>
-          </a:effectRef>
-          <a:fontRef idx="minor">
-            <a:schemeClr val="lt1"/>
-          </a:fontRef>
-        </p:style>
-        <p:txBody>
-          <a:bodyPr rtlCol="0" anchor="ctr"/>
-          <a:lstStyle/>
-          <a:p>
-            <a:pPr algn="ctr"/>
-          </a:p>
-        </p:txBody>
-      </p:sp>
-      <p:sp>
-        <p:nvSpPr>
-          <p:cNvPr id="13" name="TextBox 12"/>
+          <p:cNvPr id="10" name="TextBox 9"/>
           <p:cNvSpPr txBox="1"/>
           <p:nvPr/>
         </p:nvSpPr>
@@ -7290,7 +7158,7 @@
       </p:sp>
       <p:sp>
         <p:nvSpPr>
-          <p:cNvPr id="14" name="Rounded Rectangle 13"/>
+          <p:cNvPr id="11" name="Rounded Rectangle 10"/>
           <p:cNvSpPr/>
           <p:nvPr/>
         </p:nvSpPr>
@@ -7338,7 +7206,7 @@
       </p:sp>
       <p:sp>
         <p:nvSpPr>
-          <p:cNvPr id="15" name="TextBox 14"/>
+          <p:cNvPr id="12" name="TextBox 11"/>
           <p:cNvSpPr txBox="1"/>
           <p:nvPr/>
         </p:nvSpPr>
@@ -7373,7 +7241,7 @@
       </p:sp>
       <p:sp>
         <p:nvSpPr>
-          <p:cNvPr id="16" name="TextBox 15"/>
+          <p:cNvPr id="13" name="TextBox 12"/>
           <p:cNvSpPr txBox="1"/>
           <p:nvPr/>
         </p:nvSpPr>
@@ -7412,7 +7280,7 @@
       </p:sp>
       <p:sp>
         <p:nvSpPr>
-          <p:cNvPr id="17" name="Oval 16"/>
+          <p:cNvPr id="14" name="Oval 13"/>
           <p:cNvSpPr/>
           <p:nvPr/>
         </p:nvSpPr>
@@ -7456,7 +7324,7 @@
       </p:sp>
       <p:sp>
         <p:nvSpPr>
-          <p:cNvPr id="18" name="TextBox 17"/>
+          <p:cNvPr id="15" name="TextBox 14"/>
           <p:cNvSpPr txBox="1"/>
           <p:nvPr/>
         </p:nvSpPr>
@@ -7491,7 +7359,7 @@
       </p:sp>
       <p:sp>
         <p:nvSpPr>
-          <p:cNvPr id="19" name="Rounded Rectangle 18"/>
+          <p:cNvPr id="16" name="Rounded Rectangle 15"/>
           <p:cNvSpPr/>
           <p:nvPr/>
         </p:nvSpPr>
@@ -7539,7 +7407,7 @@
       </p:sp>
       <p:sp>
         <p:nvSpPr>
-          <p:cNvPr id="20" name="TextBox 19"/>
+          <p:cNvPr id="17" name="TextBox 16"/>
           <p:cNvSpPr txBox="1"/>
           <p:nvPr/>
         </p:nvSpPr>
@@ -7574,7 +7442,7 @@
       </p:sp>
       <p:sp>
         <p:nvSpPr>
-          <p:cNvPr id="21" name="TextBox 20"/>
+          <p:cNvPr id="18" name="TextBox 17"/>
           <p:cNvSpPr txBox="1"/>
           <p:nvPr/>
         </p:nvSpPr>
@@ -7613,7 +7481,7 @@
       </p:sp>
       <p:sp>
         <p:nvSpPr>
-          <p:cNvPr id="22" name="Oval 21"/>
+          <p:cNvPr id="19" name="Oval 18"/>
           <p:cNvSpPr/>
           <p:nvPr/>
         </p:nvSpPr>
@@ -7657,7 +7525,7 @@
       </p:sp>
       <p:sp>
         <p:nvSpPr>
-          <p:cNvPr id="23" name="TextBox 22"/>
+          <p:cNvPr id="20" name="TextBox 19"/>
           <p:cNvSpPr txBox="1"/>
           <p:nvPr/>
         </p:nvSpPr>
@@ -7692,7 +7560,7 @@
       </p:sp>
       <p:sp>
         <p:nvSpPr>
-          <p:cNvPr id="24" name="Rounded Rectangle 23"/>
+          <p:cNvPr id="21" name="Rounded Rectangle 20"/>
           <p:cNvSpPr/>
           <p:nvPr/>
         </p:nvSpPr>
@@ -7740,7 +7608,7 @@
       </p:sp>
       <p:sp>
         <p:nvSpPr>
-          <p:cNvPr id="25" name="TextBox 24"/>
+          <p:cNvPr id="22" name="TextBox 21"/>
           <p:cNvSpPr txBox="1"/>
           <p:nvPr/>
         </p:nvSpPr>
@@ -7775,7 +7643,7 @@
       </p:sp>
       <p:sp>
         <p:nvSpPr>
-          <p:cNvPr id="26" name="TextBox 25"/>
+          <p:cNvPr id="23" name="TextBox 22"/>
           <p:cNvSpPr txBox="1"/>
           <p:nvPr/>
         </p:nvSpPr>
@@ -7814,7 +7682,7 @@
       </p:sp>
       <p:sp>
         <p:nvSpPr>
-          <p:cNvPr id="27" name="Oval 26"/>
+          <p:cNvPr id="24" name="Oval 23"/>
           <p:cNvSpPr/>
           <p:nvPr/>
         </p:nvSpPr>
@@ -7858,7 +7726,7 @@
       </p:sp>
       <p:sp>
         <p:nvSpPr>
-          <p:cNvPr id="28" name="TextBox 27"/>
+          <p:cNvPr id="25" name="TextBox 24"/>
           <p:cNvSpPr txBox="1"/>
           <p:nvPr/>
         </p:nvSpPr>
@@ -7893,7 +7761,7 @@
       </p:sp>
       <p:sp>
         <p:nvSpPr>
-          <p:cNvPr id="29" name="Rounded Rectangle 28"/>
+          <p:cNvPr id="26" name="Rounded Rectangle 25"/>
           <p:cNvSpPr/>
           <p:nvPr/>
         </p:nvSpPr>
@@ -7941,7 +7809,7 @@
       </p:sp>
       <p:sp>
         <p:nvSpPr>
-          <p:cNvPr id="30" name="TextBox 29"/>
+          <p:cNvPr id="27" name="TextBox 26"/>
           <p:cNvSpPr txBox="1"/>
           <p:nvPr/>
         </p:nvSpPr>
@@ -7976,7 +7844,7 @@
       </p:sp>
       <p:sp>
         <p:nvSpPr>
-          <p:cNvPr id="31" name="TextBox 30"/>
+          <p:cNvPr id="28" name="TextBox 27"/>
           <p:cNvSpPr txBox="1"/>
           <p:nvPr/>
         </p:nvSpPr>
@@ -8015,7 +7883,7 @@
       </p:sp>
       <p:sp>
         <p:nvSpPr>
-          <p:cNvPr id="32" name="TextBox 31"/>
+          <p:cNvPr id="29" name="TextBox 28"/>
           <p:cNvSpPr txBox="1"/>
           <p:nvPr/>
         </p:nvSpPr>
@@ -8050,7 +7918,7 @@
       </p:sp>
       <p:sp>
         <p:nvSpPr>
-          <p:cNvPr id="33" name="TextBox 32"/>
+          <p:cNvPr id="30" name="TextBox 29"/>
           <p:cNvSpPr txBox="1"/>
           <p:nvPr/>
         </p:nvSpPr>
@@ -8085,7 +7953,7 @@
       </p:sp>
       <p:sp>
         <p:nvSpPr>
-          <p:cNvPr id="34" name="Rectangle 33"/>
+          <p:cNvPr id="31" name="Rectangle 30"/>
           <p:cNvSpPr/>
           <p:nvPr/>
         </p:nvSpPr>
@@ -8609,7 +8477,7 @@
           <a:p>
             <a:pPr>
               <a:lnSpc>
-                <a:spcPct val="115000"/>
+                <a:spcPct val="149500"/>
               </a:lnSpc>
             </a:pPr>
             <a:r>
@@ -8634,7 +8502,7 @@
           <a:p>
             <a:pPr>
               <a:lnSpc>
-                <a:spcPct val="115000"/>
+                <a:spcPct val="149500"/>
               </a:lnSpc>
             </a:pPr>
             <a:r>
@@ -8659,7 +8527,7 @@
           <a:p>
             <a:pPr>
               <a:lnSpc>
-                <a:spcPct val="115000"/>
+                <a:spcPct val="149500"/>
               </a:lnSpc>
             </a:pPr>
             <a:r>
@@ -9393,7 +9261,7 @@
           <a:p>
             <a:pPr>
               <a:lnSpc>
-                <a:spcPct val="115000"/>
+                <a:spcPct val="149500"/>
               </a:lnSpc>
             </a:pPr>
             <a:r>
@@ -9418,7 +9286,7 @@
           <a:p>
             <a:pPr>
               <a:lnSpc>
-                <a:spcPct val="115000"/>
+                <a:spcPct val="149500"/>
               </a:lnSpc>
             </a:pPr>
             <a:r>
@@ -9443,7 +9311,7 @@
           <a:p>
             <a:pPr>
               <a:lnSpc>
-                <a:spcPct val="115000"/>
+                <a:spcPct val="149500"/>
               </a:lnSpc>
             </a:pPr>
             <a:r>
@@ -9948,7 +9816,7 @@
           <a:p>
             <a:pPr>
               <a:lnSpc>
-                <a:spcPct val="115000"/>
+                <a:spcPct val="149500"/>
               </a:lnSpc>
             </a:pPr>
             <a:r>
@@ -9973,7 +9841,7 @@
           <a:p>
             <a:pPr>
               <a:lnSpc>
-                <a:spcPct val="115000"/>
+                <a:spcPct val="149500"/>
               </a:lnSpc>
             </a:pPr>
             <a:r>
@@ -9998,7 +9866,7 @@
           <a:p>
             <a:pPr>
               <a:lnSpc>
-                <a:spcPct val="115000"/>
+                <a:spcPct val="149500"/>
               </a:lnSpc>
             </a:pPr>
             <a:r>
@@ -10389,7 +10257,7 @@
           <a:p>
             <a:pPr>
               <a:lnSpc>
-                <a:spcPct val="115000"/>
+                <a:spcPct val="149500"/>
               </a:lnSpc>
             </a:pPr>
             <a:r>
@@ -10414,7 +10282,7 @@
           <a:p>
             <a:pPr>
               <a:lnSpc>
-                <a:spcPct val="115000"/>
+                <a:spcPct val="149500"/>
               </a:lnSpc>
             </a:pPr>
             <a:r>
@@ -10439,7 +10307,7 @@
           <a:p>
             <a:pPr>
               <a:lnSpc>
-                <a:spcPct val="115000"/>
+                <a:spcPct val="149500"/>
               </a:lnSpc>
             </a:pPr>
             <a:r>

--- a/class/cloud_infra_mgmt/12주차_Jenkins_CICD심화/01_강의자료/1차시_DeclarativePipeline문법.pptx
+++ b/class/cloud_infra_mgmt/12주차_Jenkins_CICD심화/01_강의자료/1차시_DeclarativePipeline문법.pptx
@@ -4887,6 +4887,8 @@
                   <a:srgbClr val="14B8A6"/>
                 </a:solidFill>
                 <a:latin typeface="맑은 고딕"/>
+                <a:ea typeface="맑은 고딕"/>
+                <a:cs typeface="맑은 고딕"/>
               </a:rPr>
               <a:t>클라우드인프라관리  ·  12주차 1차시</a:t>
             </a:r>
@@ -4922,6 +4924,8 @@
                   <a:srgbClr val="FFFFFF"/>
                 </a:solidFill>
                 <a:latin typeface="맑은 고딕"/>
+                <a:ea typeface="맑은 고딕"/>
+                <a:cs typeface="맑은 고딕"/>
               </a:rPr>
               <a:t>Declarative Pipeline 문법</a:t>
             </a:r>
@@ -4957,6 +4961,8 @@
                   <a:srgbClr val="C9D3E6"/>
                 </a:solidFill>
                 <a:latin typeface="맑은 고딕"/>
+                <a:ea typeface="맑은 고딕"/>
+                <a:cs typeface="맑은 고딕"/>
               </a:rPr>
               <a:t>빌드 과정을 클릭이 아니라 코드로 선언한다</a:t>
             </a:r>
@@ -4992,6 +4998,8 @@
                   <a:srgbClr val="FFFFFF"/>
                 </a:solidFill>
                 <a:latin typeface="맑은 고딕"/>
+                <a:ea typeface="맑은 고딕"/>
+                <a:cs typeface="맑은 고딕"/>
               </a:rPr>
               <a:t>영남이공대학교 김지윤교수</a:t>
             </a:r>
@@ -5151,6 +5159,8 @@
                   <a:srgbClr val="14213D"/>
                 </a:solidFill>
                 <a:latin typeface="맑은 고딕"/>
+                <a:ea typeface="맑은 고딕"/>
+                <a:cs typeface="맑은 고딕"/>
               </a:rPr>
               <a:t>03</a:t>
             </a:r>
@@ -5186,6 +5196,8 @@
                   <a:srgbClr val="14B8A6"/>
                 </a:solidFill>
                 <a:latin typeface="맑은 고딕"/>
+                <a:ea typeface="맑은 고딕"/>
+                <a:cs typeface="맑은 고딕"/>
               </a:rPr>
               <a:t>실습 안내</a:t>
             </a:r>
@@ -5221,6 +5233,8 @@
                   <a:srgbClr val="FFFFFF"/>
                 </a:solidFill>
                 <a:latin typeface="맑은 고딕"/>
+                <a:ea typeface="맑은 고딕"/>
+                <a:cs typeface="맑은 고딕"/>
               </a:rPr>
               <a:t>Killercoda — 뼈대 Jenkinsfile 빈칸 채우기</a:t>
             </a:r>
@@ -5260,6 +5274,8 @@
                   <a:srgbClr val="0D9488"/>
                 </a:solidFill>
                 <a:latin typeface="맑은 고딕"/>
+                <a:ea typeface="맑은 고딕"/>
+                <a:cs typeface="맑은 고딕"/>
               </a:rPr>
               <a:t>●  </a:t>
             </a:r>
@@ -5269,6 +5285,8 @@
                   <a:srgbClr val="222733"/>
                 </a:solidFill>
                 <a:latin typeface="맑은 고딕"/>
+                <a:ea typeface="맑은 고딕"/>
+                <a:cs typeface="맑은 고딕"/>
               </a:rPr>
               <a:t>pipeline·agent·stages 빈칸이 있는 Jenkinsfile 템플릿 제공</a:t>
             </a:r>
@@ -5285,6 +5303,8 @@
                   <a:srgbClr val="0D9488"/>
                 </a:solidFill>
                 <a:latin typeface="맑은 고딕"/>
+                <a:ea typeface="맑은 고딕"/>
+                <a:cs typeface="맑은 고딕"/>
               </a:rPr>
               <a:t>●  </a:t>
             </a:r>
@@ -5294,6 +5314,8 @@
                   <a:srgbClr val="222733"/>
                 </a:solidFill>
                 <a:latin typeface="맑은 고딕"/>
+                <a:ea typeface="맑은 고딕"/>
+                <a:cs typeface="맑은 고딕"/>
               </a:rPr>
               <a:t>echo 로그를 출력하는 3단계(예: Start → Process → Done)를 스스로 완성</a:t>
             </a:r>
@@ -5310,6 +5332,8 @@
                   <a:srgbClr val="0D9488"/>
                 </a:solidFill>
                 <a:latin typeface="맑은 고딕"/>
+                <a:ea typeface="맑은 고딕"/>
+                <a:cs typeface="맑은 고딕"/>
               </a:rPr>
               <a:t>●  </a:t>
             </a:r>
@@ -5319,6 +5343,8 @@
                   <a:srgbClr val="222733"/>
                 </a:solidFill>
                 <a:latin typeface="맑은 고딕"/>
+                <a:ea typeface="맑은 고딕"/>
+                <a:cs typeface="맑은 고딕"/>
               </a:rPr>
               <a:t>Job에 Jenkinsfile을 연결해 Build Now로 실행하고 Console Output에서 단계별 로그 확인</a:t>
             </a:r>
@@ -5354,6 +5380,8 @@
                   <a:srgbClr val="5B6373"/>
                 </a:solidFill>
                 <a:latin typeface="맑은 고딕"/>
+                <a:ea typeface="맑은 고딕"/>
+                <a:cs typeface="맑은 고딕"/>
               </a:rPr>
               <a:t>클라우드인프라관리  ·  12주차 1차시</a:t>
             </a:r>
@@ -5389,6 +5417,8 @@
                   <a:srgbClr val="5B6373"/>
                 </a:solidFill>
                 <a:latin typeface="맑은 고딕"/>
+                <a:ea typeface="맑은 고딕"/>
+                <a:cs typeface="맑은 고딕"/>
               </a:rPr>
               <a:t>10 / 13</a:t>
             </a:r>
@@ -5592,6 +5622,8 @@
                   <a:srgbClr val="14213D"/>
                 </a:solidFill>
                 <a:latin typeface="맑은 고딕"/>
+                <a:ea typeface="맑은 고딕"/>
+                <a:cs typeface="맑은 고딕"/>
               </a:rPr>
               <a:t>03</a:t>
             </a:r>
@@ -5627,6 +5659,8 @@
                   <a:srgbClr val="14B8A6"/>
                 </a:solidFill>
                 <a:latin typeface="맑은 고딕"/>
+                <a:ea typeface="맑은 고딕"/>
+                <a:cs typeface="맑은 고딕"/>
               </a:rPr>
               <a:t>실습 안내</a:t>
             </a:r>
@@ -5662,6 +5696,8 @@
                   <a:srgbClr val="FFFFFF"/>
                 </a:solidFill>
                 <a:latin typeface="맑은 고딕"/>
+                <a:ea typeface="맑은 고딕"/>
+                <a:cs typeface="맑은 고딕"/>
               </a:rPr>
               <a:t>VM 안내 — 다음 차시 예고</a:t>
             </a:r>
@@ -5701,6 +5737,8 @@
                   <a:srgbClr val="0D9488"/>
                 </a:solidFill>
                 <a:latin typeface="맑은 고딕"/>
+                <a:ea typeface="맑은 고딕"/>
+                <a:cs typeface="맑은 고딕"/>
               </a:rPr>
               <a:t>●  </a:t>
             </a:r>
@@ -5710,6 +5748,8 @@
                   <a:srgbClr val="222733"/>
                 </a:solidFill>
                 <a:latin typeface="맑은 고딕"/>
+                <a:ea typeface="맑은 고딕"/>
+                <a:cs typeface="맑은 고딕"/>
               </a:rPr>
               <a:t>오늘은 문법 위주였고, 개인 VM에는 아직 Jenkinsfile을 적용하지 않습니다</a:t>
             </a:r>
@@ -5726,6 +5766,8 @@
                   <a:srgbClr val="0D9488"/>
                 </a:solidFill>
                 <a:latin typeface="맑은 고딕"/>
+                <a:ea typeface="맑은 고딕"/>
+                <a:cs typeface="맑은 고딕"/>
               </a:rPr>
               <a:t>●  </a:t>
             </a:r>
@@ -5735,6 +5777,8 @@
                   <a:srgbClr val="222733"/>
                 </a:solidFill>
                 <a:latin typeface="맑은 고딕"/>
+                <a:ea typeface="맑은 고딕"/>
+                <a:cs typeface="맑은 고딕"/>
               </a:rPr>
               <a:t>다음 2차시에 실제 Jenkinsfile을 작성해 VM Jenkins에서 수동 빌드(Build Now)로 실행합니다</a:t>
             </a:r>
@@ -5751,6 +5795,8 @@
                   <a:srgbClr val="0D9488"/>
                 </a:solidFill>
                 <a:latin typeface="맑은 고딕"/>
+                <a:ea typeface="맑은 고딕"/>
+                <a:cs typeface="맑은 고딕"/>
               </a:rPr>
               <a:t>●  </a:t>
             </a:r>
@@ -5760,6 +5806,8 @@
                   <a:srgbClr val="222733"/>
                 </a:solidFill>
                 <a:latin typeface="맑은 고딕"/>
+                <a:ea typeface="맑은 고딕"/>
+                <a:cs typeface="맑은 고딕"/>
               </a:rPr>
               <a:t>11주차에 만든 hello-jenkins Job은 그대로 남겨두세요</a:t>
             </a:r>
@@ -5795,6 +5843,8 @@
                   <a:srgbClr val="5B6373"/>
                 </a:solidFill>
                 <a:latin typeface="맑은 고딕"/>
+                <a:ea typeface="맑은 고딕"/>
+                <a:cs typeface="맑은 고딕"/>
               </a:rPr>
               <a:t>클라우드인프라관리  ·  12주차 1차시</a:t>
             </a:r>
@@ -5830,6 +5880,8 @@
                   <a:srgbClr val="5B6373"/>
                 </a:solidFill>
                 <a:latin typeface="맑은 고딕"/>
+                <a:ea typeface="맑은 고딕"/>
+                <a:cs typeface="맑은 고딕"/>
               </a:rPr>
               <a:t>11 / 13</a:t>
             </a:r>
@@ -6015,6 +6067,8 @@
                   <a:srgbClr val="FFFFFF"/>
                 </a:solidFill>
                 <a:latin typeface="맑은 고딕"/>
+                <a:ea typeface="맑은 고딕"/>
+                <a:cs typeface="맑은 고딕"/>
               </a:rPr>
               <a:t>오늘의 정리</a:t>
             </a:r>
@@ -6068,6 +6122,8 @@
                   <a:srgbClr val="14213D"/>
                 </a:solidFill>
                 <a:latin typeface="맑은 고딕"/>
+                <a:ea typeface="맑은 고딕"/>
+                <a:cs typeface="맑은 고딕"/>
               </a:rPr>
               <a:t>1</a:t>
             </a:r>
@@ -6103,6 +6159,8 @@
                   <a:srgbClr val="FFFFFF"/>
                 </a:solidFill>
                 <a:latin typeface="맑은 고딕"/>
+                <a:ea typeface="맑은 고딕"/>
+                <a:cs typeface="맑은 고딕"/>
               </a:rPr>
               <a:t>Jenkinsfile은 빌드 파이프라인을 코드로 선언해 버전 관리·재사용이 가능하게 한다</a:t>
             </a:r>
@@ -6156,6 +6214,8 @@
                   <a:srgbClr val="14213D"/>
                 </a:solidFill>
                 <a:latin typeface="맑은 고딕"/>
+                <a:ea typeface="맑은 고딕"/>
+                <a:cs typeface="맑은 고딕"/>
               </a:rPr>
               <a:t>2</a:t>
             </a:r>
@@ -6191,6 +6251,8 @@
                   <a:srgbClr val="FFFFFF"/>
                 </a:solidFill>
                 <a:latin typeface="맑은 고딕"/>
+                <a:ea typeface="맑은 고딕"/>
+                <a:cs typeface="맑은 고딕"/>
               </a:rPr>
               <a:t>pipeline → stages → steps 구조로 단계를 나누고, environment·withCredentials로 변수와 민감정보를 다룬다</a:t>
             </a:r>
@@ -6332,6 +6394,8 @@
                   <a:srgbClr val="FFFFFF"/>
                 </a:solidFill>
                 <a:latin typeface="맑은 고딕"/>
+                <a:ea typeface="맑은 고딕"/>
+                <a:cs typeface="맑은 고딕"/>
               </a:rPr>
               <a:t>다음 차시 예고</a:t>
             </a:r>
@@ -6367,6 +6431,8 @@
                   <a:srgbClr val="14B8A6"/>
                 </a:solidFill>
                 <a:latin typeface="맑은 고딕"/>
+                <a:ea typeface="맑은 고딕"/>
+                <a:cs typeface="맑은 고딕"/>
               </a:rPr>
               <a:t>다음 차시 예고 — 12주차 2차시</a:t>
             </a:r>
@@ -6402,6 +6468,8 @@
                   <a:srgbClr val="FFFFFF"/>
                 </a:solidFill>
                 <a:latin typeface="맑은 고딕"/>
+                <a:ea typeface="맑은 고딕"/>
+                <a:cs typeface="맑은 고딕"/>
               </a:rPr>
               <a:t>직접 Jenkinsfile을 작성해서 VM의 Jenkins Job에 연결하고, Build Now로 수동 빌드를 실행해봅니다.</a:t>
             </a:r>
@@ -6543,6 +6611,8 @@
                   <a:srgbClr val="14B8A6"/>
                 </a:solidFill>
                 <a:latin typeface="맑은 고딕"/>
+                <a:ea typeface="맑은 고딕"/>
+                <a:cs typeface="맑은 고딕"/>
               </a:rPr>
               <a:t>SESSION OVERVIEW</a:t>
             </a:r>
@@ -6578,6 +6648,8 @@
                   <a:srgbClr val="FFFFFF"/>
                 </a:solidFill>
                 <a:latin typeface="맑은 고딕"/>
+                <a:ea typeface="맑은 고딕"/>
+                <a:cs typeface="맑은 고딕"/>
               </a:rPr>
               <a:t>오늘의 학습 목표</a:t>
             </a:r>
@@ -6617,6 +6689,8 @@
                   <a:srgbClr val="222733"/>
                 </a:solidFill>
                 <a:latin typeface="맑은 고딕"/>
+                <a:ea typeface="맑은 고딕"/>
+                <a:cs typeface="맑은 고딕"/>
               </a:rPr>
               <a:t>1.  Freestyle Job과 Pipeline(Jenkinsfile) 방식의 차이를 이해한다</a:t>
             </a:r>
@@ -6633,6 +6707,8 @@
                   <a:srgbClr val="222733"/>
                 </a:solidFill>
                 <a:latin typeface="맑은 고딕"/>
+                <a:ea typeface="맑은 고딕"/>
+                <a:cs typeface="맑은 고딕"/>
               </a:rPr>
               <a:t>2.  Declarative Pipeline의 기본 구조(pipeline·stages·steps)를 이해한다</a:t>
             </a:r>
@@ -6649,6 +6725,8 @@
                   <a:srgbClr val="222733"/>
                 </a:solidFill>
                 <a:latin typeface="맑은 고딕"/>
+                <a:ea typeface="맑은 고딕"/>
+                <a:cs typeface="맑은 고딕"/>
               </a:rPr>
               <a:t>3.  Stage·환경변수·Credential이 파이프라인에서 하는 역할을 이해한다</a:t>
             </a:r>
@@ -6684,6 +6762,8 @@
                   <a:srgbClr val="5B6373"/>
                 </a:solidFill>
                 <a:latin typeface="맑은 고딕"/>
+                <a:ea typeface="맑은 고딕"/>
+                <a:cs typeface="맑은 고딕"/>
               </a:rPr>
               <a:t>클라우드인프라관리  ·  12주차 1차시</a:t>
             </a:r>
@@ -6719,6 +6799,8 @@
                   <a:srgbClr val="5B6373"/>
                 </a:solidFill>
                 <a:latin typeface="맑은 고딕"/>
+                <a:ea typeface="맑은 고딕"/>
+                <a:cs typeface="맑은 고딕"/>
               </a:rPr>
               <a:t>02 / 13</a:t>
             </a:r>
@@ -6904,6 +6986,8 @@
                   <a:srgbClr val="14B8A6"/>
                 </a:solidFill>
                 <a:latin typeface="맑은 고딕"/>
+                <a:ea typeface="맑은 고딕"/>
+                <a:cs typeface="맑은 고딕"/>
               </a:rPr>
               <a:t>SESSION OVERVIEW</a:t>
             </a:r>
@@ -6939,6 +7023,8 @@
                   <a:srgbClr val="FFFFFF"/>
                 </a:solidFill>
                 <a:latin typeface="맑은 고딕"/>
+                <a:ea typeface="맑은 고딕"/>
+                <a:cs typeface="맑은 고딕"/>
               </a:rPr>
               <a:t>오늘의 진행 순서</a:t>
             </a:r>
@@ -7150,6 +7236,8 @@
                   <a:srgbClr val="FFFFFF"/>
                 </a:solidFill>
                 <a:latin typeface="맑은 고딕"/>
+                <a:ea typeface="맑은 고딕"/>
+                <a:cs typeface="맑은 고딕"/>
               </a:rPr>
               <a:t>1</a:t>
             </a:r>
@@ -7233,6 +7321,8 @@
                   <a:srgbClr val="14213D"/>
                 </a:solidFill>
                 <a:latin typeface="맑은 고딕"/>
+                <a:ea typeface="맑은 고딕"/>
+                <a:cs typeface="맑은 고딕"/>
               </a:rPr>
               <a:t>개념 설명</a:t>
             </a:r>
@@ -7272,6 +7362,8 @@
                   <a:srgbClr val="222733"/>
                 </a:solidFill>
                 <a:latin typeface="맑은 고딕"/>
+                <a:ea typeface="맑은 고딕"/>
+                <a:cs typeface="맑은 고딕"/>
               </a:rPr>
               <a:t>강의자료 기반 직접 강의</a:t>
             </a:r>
@@ -7351,6 +7443,8 @@
                   <a:srgbClr val="FFFFFF"/>
                 </a:solidFill>
                 <a:latin typeface="맑은 고딕"/>
+                <a:ea typeface="맑은 고딕"/>
+                <a:cs typeface="맑은 고딕"/>
               </a:rPr>
               <a:t>2</a:t>
             </a:r>
@@ -7434,6 +7528,8 @@
                   <a:srgbClr val="14213D"/>
                 </a:solidFill>
                 <a:latin typeface="맑은 고딕"/>
+                <a:ea typeface="맑은 고딕"/>
+                <a:cs typeface="맑은 고딕"/>
               </a:rPr>
               <a:t>Killercoda</a:t>
             </a:r>
@@ -7473,6 +7569,8 @@
                   <a:srgbClr val="222733"/>
                 </a:solidFill>
                 <a:latin typeface="맑은 고딕"/>
+                <a:ea typeface="맑은 고딕"/>
+                <a:cs typeface="맑은 고딕"/>
               </a:rPr>
               <a:t>뼈대 Jenkinsfile 빈칸 채우기</a:t>
             </a:r>
@@ -7552,6 +7650,8 @@
                   <a:srgbClr val="FFFFFF"/>
                 </a:solidFill>
                 <a:latin typeface="맑은 고딕"/>
+                <a:ea typeface="맑은 고딕"/>
+                <a:cs typeface="맑은 고딕"/>
               </a:rPr>
               <a:t>3</a:t>
             </a:r>
@@ -7635,6 +7735,8 @@
                   <a:srgbClr val="14213D"/>
                 </a:solidFill>
                 <a:latin typeface="맑은 고딕"/>
+                <a:ea typeface="맑은 고딕"/>
+                <a:cs typeface="맑은 고딕"/>
               </a:rPr>
               <a:t>VM 안내</a:t>
             </a:r>
@@ -7674,6 +7776,8 @@
                   <a:srgbClr val="222733"/>
                 </a:solidFill>
                 <a:latin typeface="맑은 고딕"/>
+                <a:ea typeface="맑은 고딕"/>
+                <a:cs typeface="맑은 고딕"/>
               </a:rPr>
               <a:t>다음 차시 실습 예고</a:t>
             </a:r>
@@ -7753,6 +7857,8 @@
                   <a:srgbClr val="FFFFFF"/>
                 </a:solidFill>
                 <a:latin typeface="맑은 고딕"/>
+                <a:ea typeface="맑은 고딕"/>
+                <a:cs typeface="맑은 고딕"/>
               </a:rPr>
               <a:t>4</a:t>
             </a:r>
@@ -7836,6 +7942,8 @@
                   <a:srgbClr val="14213D"/>
                 </a:solidFill>
                 <a:latin typeface="맑은 고딕"/>
+                <a:ea typeface="맑은 고딕"/>
+                <a:cs typeface="맑은 고딕"/>
               </a:rPr>
               <a:t>결과 제출</a:t>
             </a:r>
@@ -7875,6 +7983,8 @@
                   <a:srgbClr val="222733"/>
                 </a:solidFill>
                 <a:latin typeface="맑은 고딕"/>
+                <a:ea typeface="맑은 고딕"/>
+                <a:cs typeface="맑은 고딕"/>
               </a:rPr>
               <a:t>체크리스트 제출</a:t>
             </a:r>
@@ -7910,6 +8020,8 @@
                   <a:srgbClr val="5B6373"/>
                 </a:solidFill>
                 <a:latin typeface="맑은 고딕"/>
+                <a:ea typeface="맑은 고딕"/>
+                <a:cs typeface="맑은 고딕"/>
               </a:rPr>
               <a:t>클라우드인프라관리  ·  12주차 1차시</a:t>
             </a:r>
@@ -7945,6 +8057,8 @@
                   <a:srgbClr val="5B6373"/>
                 </a:solidFill>
                 <a:latin typeface="맑은 고딕"/>
+                <a:ea typeface="맑은 고딕"/>
+                <a:cs typeface="맑은 고딕"/>
               </a:rPr>
               <a:t>03 / 13</a:t>
             </a:r>
@@ -8148,6 +8262,8 @@
                   <a:srgbClr val="14213D"/>
                 </a:solidFill>
                 <a:latin typeface="맑은 고딕"/>
+                <a:ea typeface="맑은 고딕"/>
+                <a:cs typeface="맑은 고딕"/>
               </a:rPr>
               <a:t>PART 01</a:t>
             </a:r>
@@ -8183,6 +8299,8 @@
                   <a:srgbClr val="FFFFFF"/>
                 </a:solidFill>
                 <a:latin typeface="맑은 고딕"/>
+                <a:ea typeface="맑은 고딕"/>
+                <a:cs typeface="맑은 고딕"/>
               </a:rPr>
               <a:t>왜 Jenkinsfile로 옮겨가는가</a:t>
             </a:r>
@@ -8218,6 +8336,8 @@
                   <a:srgbClr val="C9D3E6"/>
                 </a:solidFill>
                 <a:latin typeface="맑은 고딕"/>
+                <a:ea typeface="맑은 고딕"/>
+                <a:cs typeface="맑은 고딕"/>
               </a:rPr>
               <a:t>클릭 설정의 한계</a:t>
             </a:r>
@@ -8377,6 +8497,8 @@
                   <a:srgbClr val="14213D"/>
                 </a:solidFill>
                 <a:latin typeface="맑은 고딕"/>
+                <a:ea typeface="맑은 고딕"/>
+                <a:cs typeface="맑은 고딕"/>
               </a:rPr>
               <a:t>01</a:t>
             </a:r>
@@ -8412,6 +8534,8 @@
                   <a:srgbClr val="14B8A6"/>
                 </a:solidFill>
                 <a:latin typeface="맑은 고딕"/>
+                <a:ea typeface="맑은 고딕"/>
+                <a:cs typeface="맑은 고딕"/>
               </a:rPr>
               <a:t>PART 1 · Pipeline이 필요한 이유</a:t>
             </a:r>
@@ -8447,6 +8571,8 @@
                   <a:srgbClr val="FFFFFF"/>
                 </a:solidFill>
                 <a:latin typeface="맑은 고딕"/>
+                <a:ea typeface="맑은 고딕"/>
+                <a:cs typeface="맑은 고딕"/>
               </a:rPr>
               <a:t>Freestyle Job의 한계</a:t>
             </a:r>
@@ -8486,6 +8612,8 @@
                   <a:srgbClr val="0D9488"/>
                 </a:solidFill>
                 <a:latin typeface="맑은 고딕"/>
+                <a:ea typeface="맑은 고딕"/>
+                <a:cs typeface="맑은 고딕"/>
               </a:rPr>
               <a:t>●  </a:t>
             </a:r>
@@ -8495,6 +8623,8 @@
                   <a:srgbClr val="222733"/>
                 </a:solidFill>
                 <a:latin typeface="맑은 고딕"/>
+                <a:ea typeface="맑은 고딕"/>
+                <a:cs typeface="맑은 고딕"/>
               </a:rPr>
               <a:t>11주차 hello-jenkins는 화면에서 클릭으로 설정 — 다른 사람과 그 설정을 공유하기 어려움</a:t>
             </a:r>
@@ -8511,6 +8641,8 @@
                   <a:srgbClr val="0D9488"/>
                 </a:solidFill>
                 <a:latin typeface="맑은 고딕"/>
+                <a:ea typeface="맑은 고딕"/>
+                <a:cs typeface="맑은 고딕"/>
               </a:rPr>
               <a:t>●  </a:t>
             </a:r>
@@ -8520,6 +8652,8 @@
                   <a:srgbClr val="222733"/>
                 </a:solidFill>
                 <a:latin typeface="맑은 고딕"/>
+                <a:ea typeface="맑은 고딕"/>
+                <a:cs typeface="맑은 고딕"/>
               </a:rPr>
               <a:t>빌드 단계가 늘어날수록(체크아웃→빌드→푸시→배포) 화면 설정만으로는 복잡해짐</a:t>
             </a:r>
@@ -8536,6 +8670,8 @@
                   <a:srgbClr val="0D9488"/>
                 </a:solidFill>
                 <a:latin typeface="맑은 고딕"/>
+                <a:ea typeface="맑은 고딕"/>
+                <a:cs typeface="맑은 고딕"/>
               </a:rPr>
               <a:t>●  </a:t>
             </a:r>
@@ -8545,6 +8681,8 @@
                   <a:srgbClr val="222733"/>
                 </a:solidFill>
                 <a:latin typeface="맑은 고딕"/>
+                <a:ea typeface="맑은 고딕"/>
+                <a:cs typeface="맑은 고딕"/>
               </a:rPr>
               <a:t>설정을 코드로 관리하면 Git으로 버전 관리, 리뷰, 재사용이 가능해짐</a:t>
             </a:r>
@@ -8624,6 +8762,8 @@
                   <a:srgbClr val="FFFFFF"/>
                 </a:solidFill>
                 <a:latin typeface="맑은 고딕"/>
+                <a:ea typeface="맑은 고딕"/>
+                <a:cs typeface="맑은 고딕"/>
               </a:rPr>
               <a:t>💡  Jenkinsfile</a:t>
             </a:r>
@@ -8659,6 +8799,8 @@
                   <a:srgbClr val="FFFFFF"/>
                 </a:solidFill>
                 <a:latin typeface="맑은 고딕"/>
+                <a:ea typeface="맑은 고딕"/>
+                <a:cs typeface="맑은 고딕"/>
               </a:rPr>
               <a:t>Jenkins의 빌드 파이프라인을 코드(텍스트 파일)로 선언하는 방식</a:t>
             </a:r>
@@ -8694,6 +8836,8 @@
                   <a:srgbClr val="5B6373"/>
                 </a:solidFill>
                 <a:latin typeface="맑은 고딕"/>
+                <a:ea typeface="맑은 고딕"/>
+                <a:cs typeface="맑은 고딕"/>
               </a:rPr>
               <a:t>클라우드인프라관리  ·  12주차 1차시</a:t>
             </a:r>
@@ -8729,6 +8873,8 @@
                   <a:srgbClr val="5B6373"/>
                 </a:solidFill>
                 <a:latin typeface="맑은 고딕"/>
+                <a:ea typeface="맑은 고딕"/>
+                <a:cs typeface="맑은 고딕"/>
               </a:rPr>
               <a:t>05 / 13</a:t>
             </a:r>
@@ -8932,6 +9078,8 @@
                   <a:srgbClr val="14213D"/>
                 </a:solidFill>
                 <a:latin typeface="맑은 고딕"/>
+                <a:ea typeface="맑은 고딕"/>
+                <a:cs typeface="맑은 고딕"/>
               </a:rPr>
               <a:t>PART 02</a:t>
             </a:r>
@@ -8967,6 +9115,8 @@
                   <a:srgbClr val="FFFFFF"/>
                 </a:solidFill>
                 <a:latin typeface="맑은 고딕"/>
+                <a:ea typeface="맑은 고딕"/>
+                <a:cs typeface="맑은 고딕"/>
               </a:rPr>
               <a:t>Declarative Pipeline 문법</a:t>
             </a:r>
@@ -9002,6 +9152,8 @@
                   <a:srgbClr val="C9D3E6"/>
                 </a:solidFill>
                 <a:latin typeface="맑은 고딕"/>
+                <a:ea typeface="맑은 고딕"/>
+                <a:cs typeface="맑은 고딕"/>
               </a:rPr>
               <a:t>가장 표준적인 Jenkinsfile 작성 방식</a:t>
             </a:r>
@@ -9161,6 +9313,8 @@
                   <a:srgbClr val="14213D"/>
                 </a:solidFill>
                 <a:latin typeface="맑은 고딕"/>
+                <a:ea typeface="맑은 고딕"/>
+                <a:cs typeface="맑은 고딕"/>
               </a:rPr>
               <a:t>02</a:t>
             </a:r>
@@ -9196,6 +9350,8 @@
                   <a:srgbClr val="14B8A6"/>
                 </a:solidFill>
                 <a:latin typeface="맑은 고딕"/>
+                <a:ea typeface="맑은 고딕"/>
+                <a:cs typeface="맑은 고딕"/>
               </a:rPr>
               <a:t>PART 2 · Pipeline 문법</a:t>
             </a:r>
@@ -9231,6 +9387,8 @@
                   <a:srgbClr val="FFFFFF"/>
                 </a:solidFill>
                 <a:latin typeface="맑은 고딕"/>
+                <a:ea typeface="맑은 고딕"/>
+                <a:cs typeface="맑은 고딕"/>
               </a:rPr>
               <a:t>Jenkinsfile의 기본 뼈대</a:t>
             </a:r>
@@ -9270,6 +9428,8 @@
                   <a:srgbClr val="0D9488"/>
                 </a:solidFill>
                 <a:latin typeface="맑은 고딕"/>
+                <a:ea typeface="맑은 고딕"/>
+                <a:cs typeface="맑은 고딕"/>
               </a:rPr>
               <a:t>●  </a:t>
             </a:r>
@@ -9279,6 +9439,8 @@
                   <a:srgbClr val="222733"/>
                 </a:solidFill>
                 <a:latin typeface="맑은 고딕"/>
+                <a:ea typeface="맑은 고딕"/>
+                <a:cs typeface="맑은 고딕"/>
               </a:rPr>
               <a:t>pipeline { } — 전체를 감싸는 최상위 블록</a:t>
             </a:r>
@@ -9295,6 +9457,8 @@
                   <a:srgbClr val="0D9488"/>
                 </a:solidFill>
                 <a:latin typeface="맑은 고딕"/>
+                <a:ea typeface="맑은 고딕"/>
+                <a:cs typeface="맑은 고딕"/>
               </a:rPr>
               <a:t>●  </a:t>
             </a:r>
@@ -9304,6 +9468,8 @@
                   <a:srgbClr val="222733"/>
                 </a:solidFill>
                 <a:latin typeface="맑은 고딕"/>
+                <a:ea typeface="맑은 고딕"/>
+                <a:cs typeface="맑은 고딕"/>
               </a:rPr>
               <a:t>agent any — 이 파이프라인을 어떤 서버(에이전트)에서 실행할지 지정</a:t>
             </a:r>
@@ -9320,6 +9486,8 @@
                   <a:srgbClr val="0D9488"/>
                 </a:solidFill>
                 <a:latin typeface="맑은 고딕"/>
+                <a:ea typeface="맑은 고딕"/>
+                <a:cs typeface="맑은 고딕"/>
               </a:rPr>
               <a:t>●  </a:t>
             </a:r>
@@ -9329,6 +9497,8 @@
                   <a:srgbClr val="222733"/>
                 </a:solidFill>
                 <a:latin typeface="맑은 고딕"/>
+                <a:ea typeface="맑은 고딕"/>
+                <a:cs typeface="맑은 고딕"/>
               </a:rPr>
               <a:t>stages { stage("이름") { steps { ... } } } — 단계별 작업을 순서대로 나열</a:t>
             </a:r>
@@ -9364,6 +9534,8 @@
                   <a:srgbClr val="14213D"/>
                 </a:solidFill>
                 <a:latin typeface="맑은 고딕"/>
+                <a:ea typeface="맑은 고딕"/>
+                <a:cs typeface="맑은 고딕"/>
               </a:rPr>
               <a:t>기본 뼈대</a:t>
             </a:r>
@@ -9443,6 +9615,8 @@
                   <a:srgbClr val="FFFFFF"/>
                 </a:solidFill>
                 <a:latin typeface="맑은 고딕"/>
+                <a:ea typeface="맑은 고딕"/>
+                <a:cs typeface="맑은 고딕"/>
               </a:rPr>
               <a:t>pipeline { agent any</a:t>
             </a:r>
@@ -9478,6 +9652,8 @@
                   <a:srgbClr val="5B6373"/>
                 </a:solidFill>
                 <a:latin typeface="맑은 고딕"/>
+                <a:ea typeface="맑은 고딕"/>
+                <a:cs typeface="맑은 고딕"/>
               </a:rPr>
               <a:t>클라우드인프라관리  ·  12주차 1차시</a:t>
             </a:r>
@@ -9513,6 +9689,8 @@
                   <a:srgbClr val="5B6373"/>
                 </a:solidFill>
                 <a:latin typeface="맑은 고딕"/>
+                <a:ea typeface="맑은 고딕"/>
+                <a:cs typeface="맑은 고딕"/>
               </a:rPr>
               <a:t>07 / 13</a:t>
             </a:r>
@@ -9716,6 +9894,8 @@
                   <a:srgbClr val="14213D"/>
                 </a:solidFill>
                 <a:latin typeface="맑은 고딕"/>
+                <a:ea typeface="맑은 고딕"/>
+                <a:cs typeface="맑은 고딕"/>
               </a:rPr>
               <a:t>02</a:t>
             </a:r>
@@ -9751,6 +9931,8 @@
                   <a:srgbClr val="14B8A6"/>
                 </a:solidFill>
                 <a:latin typeface="맑은 고딕"/>
+                <a:ea typeface="맑은 고딕"/>
+                <a:cs typeface="맑은 고딕"/>
               </a:rPr>
               <a:t>PART 2 · Pipeline 문법</a:t>
             </a:r>
@@ -9786,6 +9968,8 @@
                   <a:srgbClr val="FFFFFF"/>
                 </a:solidFill>
                 <a:latin typeface="맑은 고딕"/>
+                <a:ea typeface="맑은 고딕"/>
+                <a:cs typeface="맑은 고딕"/>
               </a:rPr>
               <a:t>Stage로 단계 나누기</a:t>
             </a:r>
@@ -9825,6 +10009,8 @@
                   <a:srgbClr val="0D9488"/>
                 </a:solidFill>
                 <a:latin typeface="맑은 고딕"/>
+                <a:ea typeface="맑은 고딕"/>
+                <a:cs typeface="맑은 고딕"/>
               </a:rPr>
               <a:t>●  </a:t>
             </a:r>
@@ -9834,6 +10020,8 @@
                   <a:srgbClr val="222733"/>
                 </a:solidFill>
                 <a:latin typeface="맑은 고딕"/>
+                <a:ea typeface="맑은 고딕"/>
+                <a:cs typeface="맑은 고딕"/>
               </a:rPr>
               <a:t>하나의 파이프라인을 여러 stage로 나눠서 각 단계가 무슨 일을 하는지 명확히 표현</a:t>
             </a:r>
@@ -9850,6 +10038,8 @@
                   <a:srgbClr val="0D9488"/>
                 </a:solidFill>
                 <a:latin typeface="맑은 고딕"/>
+                <a:ea typeface="맑은 고딕"/>
+                <a:cs typeface="맑은 고딕"/>
               </a:rPr>
               <a:t>●  </a:t>
             </a:r>
@@ -9859,6 +10049,8 @@
                   <a:srgbClr val="222733"/>
                 </a:solidFill>
                 <a:latin typeface="맑은 고딕"/>
+                <a:ea typeface="맑은 고딕"/>
+                <a:cs typeface="맑은 고딕"/>
               </a:rPr>
               <a:t>예: Checkout(코드 받기) → Build(빌드) → Push(업로드) → Deploy(배포)</a:t>
             </a:r>
@@ -9875,6 +10067,8 @@
                   <a:srgbClr val="0D9488"/>
                 </a:solidFill>
                 <a:latin typeface="맑은 고딕"/>
+                <a:ea typeface="맑은 고딕"/>
+                <a:cs typeface="맑은 고딕"/>
               </a:rPr>
               <a:t>●  </a:t>
             </a:r>
@@ -9884,6 +10078,8 @@
                   <a:srgbClr val="222733"/>
                 </a:solidFill>
                 <a:latin typeface="맑은 고딕"/>
+                <a:ea typeface="맑은 고딕"/>
+                <a:cs typeface="맑은 고딕"/>
               </a:rPr>
               <a:t>Jenkins UI에서 각 stage가 성공했는지 실패했는지 시각적으로 확인 가능</a:t>
             </a:r>
@@ -9919,6 +10115,8 @@
                   <a:srgbClr val="5B6373"/>
                 </a:solidFill>
                 <a:latin typeface="맑은 고딕"/>
+                <a:ea typeface="맑은 고딕"/>
+                <a:cs typeface="맑은 고딕"/>
               </a:rPr>
               <a:t>클라우드인프라관리  ·  12주차 1차시</a:t>
             </a:r>
@@ -9954,6 +10152,8 @@
                   <a:srgbClr val="5B6373"/>
                 </a:solidFill>
                 <a:latin typeface="맑은 고딕"/>
+                <a:ea typeface="맑은 고딕"/>
+                <a:cs typeface="맑은 고딕"/>
               </a:rPr>
               <a:t>08 / 13</a:t>
             </a:r>
@@ -10157,6 +10357,8 @@
                   <a:srgbClr val="14213D"/>
                 </a:solidFill>
                 <a:latin typeface="맑은 고딕"/>
+                <a:ea typeface="맑은 고딕"/>
+                <a:cs typeface="맑은 고딕"/>
               </a:rPr>
               <a:t>02</a:t>
             </a:r>
@@ -10192,6 +10394,8 @@
                   <a:srgbClr val="14B8A6"/>
                 </a:solidFill>
                 <a:latin typeface="맑은 고딕"/>
+                <a:ea typeface="맑은 고딕"/>
+                <a:cs typeface="맑은 고딕"/>
               </a:rPr>
               <a:t>PART 2 · Pipeline 문법</a:t>
             </a:r>
@@ -10227,6 +10431,8 @@
                   <a:srgbClr val="FFFFFF"/>
                 </a:solidFill>
                 <a:latin typeface="맑은 고딕"/>
+                <a:ea typeface="맑은 고딕"/>
+                <a:cs typeface="맑은 고딕"/>
               </a:rPr>
               <a:t>환경변수와 Credential</a:t>
             </a:r>
@@ -10266,6 +10472,8 @@
                   <a:srgbClr val="0D9488"/>
                 </a:solidFill>
                 <a:latin typeface="맑은 고딕"/>
+                <a:ea typeface="맑은 고딕"/>
+                <a:cs typeface="맑은 고딕"/>
               </a:rPr>
               <a:t>●  </a:t>
             </a:r>
@@ -10275,6 +10483,8 @@
                   <a:srgbClr val="222733"/>
                 </a:solidFill>
                 <a:latin typeface="맑은 고딕"/>
+                <a:ea typeface="맑은 고딕"/>
+                <a:cs typeface="맑은 고딕"/>
               </a:rPr>
               <a:t>environment { } — 파이프라인 전체에서 쓸 환경변수를 선언</a:t>
             </a:r>
@@ -10291,6 +10501,8 @@
                   <a:srgbClr val="0D9488"/>
                 </a:solidFill>
                 <a:latin typeface="맑은 고딕"/>
+                <a:ea typeface="맑은 고딕"/>
+                <a:cs typeface="맑은 고딕"/>
               </a:rPr>
               <a:t>●  </a:t>
             </a:r>
@@ -10300,6 +10512,8 @@
                   <a:srgbClr val="222733"/>
                 </a:solidFill>
                 <a:latin typeface="맑은 고딕"/>
+                <a:ea typeface="맑은 고딕"/>
+                <a:cs typeface="맑은 고딕"/>
               </a:rPr>
               <a:t>$BUILD_NUMBER 같은 Jenkins 기본 제공 변수도 자동으로 사용 가능</a:t>
             </a:r>
@@ -10316,6 +10530,8 @@
                   <a:srgbClr val="0D9488"/>
                 </a:solidFill>
                 <a:latin typeface="맑은 고딕"/>
+                <a:ea typeface="맑은 고딕"/>
+                <a:cs typeface="맑은 고딕"/>
               </a:rPr>
               <a:t>●  </a:t>
             </a:r>
@@ -10325,6 +10541,8 @@
                   <a:srgbClr val="222733"/>
                 </a:solidFill>
                 <a:latin typeface="맑은 고딕"/>
+                <a:ea typeface="맑은 고딕"/>
+                <a:cs typeface="맑은 고딕"/>
               </a:rPr>
               <a:t>withCredentials { } — Docker Hub 비밀번호 같은 민감정보를 코드에 노출하지 않고 안전하게 사용</a:t>
             </a:r>
@@ -10360,6 +10578,8 @@
                   <a:srgbClr val="5B6373"/>
                 </a:solidFill>
                 <a:latin typeface="맑은 고딕"/>
+                <a:ea typeface="맑은 고딕"/>
+                <a:cs typeface="맑은 고딕"/>
               </a:rPr>
               <a:t>클라우드인프라관리  ·  12주차 1차시</a:t>
             </a:r>
@@ -10395,6 +10615,8 @@
                   <a:srgbClr val="5B6373"/>
                 </a:solidFill>
                 <a:latin typeface="맑은 고딕"/>
+                <a:ea typeface="맑은 고딕"/>
+                <a:cs typeface="맑은 고딕"/>
               </a:rPr>
               <a:t>09 / 13</a:t>
             </a:r>

--- a/class/cloud_infra_mgmt/12주차_Jenkins_CICD심화/01_강의자료/1차시_DeclarativePipeline문법.pptx
+++ b/class/cloud_infra_mgmt/12주차_Jenkins_CICD심화/01_강의자료/1차시_DeclarativePipeline문법.pptx
@@ -9618,7 +9618,105 @@
                 <a:ea typeface="맑은 고딕"/>
                 <a:cs typeface="맑은 고딕"/>
               </a:rPr>
-              <a:t>pipeline { agent any</a:t>
+              <a:t>pipeline {</a:t>
+            </a:r>
+          </a:p>
+          <a:p>
+            <a:pPr algn="ctr"/>
+            <a:r>
+              <a:rPr sz="1200" b="1">
+                <a:solidFill>
+                  <a:srgbClr val="FFFFFF"/>
+                </a:solidFill>
+                <a:latin typeface="맑은 고딕"/>
+                <a:ea typeface="맑은 고딕"/>
+                <a:cs typeface="맑은 고딕"/>
+              </a:rPr>
+              <a:t>  agent any</a:t>
+            </a:r>
+          </a:p>
+          <a:p>
+            <a:pPr algn="ctr"/>
+            <a:r>
+              <a:rPr sz="1200" b="1">
+                <a:solidFill>
+                  <a:srgbClr val="FFFFFF"/>
+                </a:solidFill>
+                <a:latin typeface="맑은 고딕"/>
+                <a:ea typeface="맑은 고딕"/>
+                <a:cs typeface="맑은 고딕"/>
+              </a:rPr>
+              <a:t>  stages {</a:t>
+            </a:r>
+          </a:p>
+          <a:p>
+            <a:pPr algn="ctr"/>
+            <a:r>
+              <a:rPr sz="1200" b="1">
+                <a:solidFill>
+                  <a:srgbClr val="FFFFFF"/>
+                </a:solidFill>
+                <a:latin typeface="맑은 고딕"/>
+                <a:ea typeface="맑은 고딕"/>
+                <a:cs typeface="맑은 고딕"/>
+              </a:rPr>
+              <a:t>    stage("Build") {</a:t>
+            </a:r>
+          </a:p>
+          <a:p>
+            <a:pPr algn="ctr"/>
+            <a:r>
+              <a:rPr sz="1200" b="1">
+                <a:solidFill>
+                  <a:srgbClr val="FFFFFF"/>
+                </a:solidFill>
+                <a:latin typeface="맑은 고딕"/>
+                <a:ea typeface="맑은 고딕"/>
+                <a:cs typeface="맑은 고딕"/>
+              </a:rPr>
+              <a:t>      steps { ... }</a:t>
+            </a:r>
+          </a:p>
+          <a:p>
+            <a:pPr algn="ctr"/>
+            <a:r>
+              <a:rPr sz="1200" b="1">
+                <a:solidFill>
+                  <a:srgbClr val="FFFFFF"/>
+                </a:solidFill>
+                <a:latin typeface="맑은 고딕"/>
+                <a:ea typeface="맑은 고딕"/>
+                <a:cs typeface="맑은 고딕"/>
+              </a:rPr>
+              <a:t>    }</a:t>
+            </a:r>
+          </a:p>
+          <a:p>
+            <a:pPr algn="ctr"/>
+            <a:r>
+              <a:rPr sz="1200" b="1">
+                <a:solidFill>
+                  <a:srgbClr val="FFFFFF"/>
+                </a:solidFill>
+                <a:latin typeface="맑은 고딕"/>
+                <a:ea typeface="맑은 고딕"/>
+                <a:cs typeface="맑은 고딕"/>
+              </a:rPr>
+              <a:t>  }</a:t>
+            </a:r>
+          </a:p>
+          <a:p>
+            <a:pPr algn="ctr"/>
+            <a:r>
+              <a:rPr sz="1200" b="1">
+                <a:solidFill>
+                  <a:srgbClr val="FFFFFF"/>
+                </a:solidFill>
+                <a:latin typeface="맑은 고딕"/>
+                <a:ea typeface="맑은 고딕"/>
+                <a:cs typeface="맑은 고딕"/>
+              </a:rPr>
+              <a:t>}</a:t>
             </a:r>
           </a:p>
         </p:txBody>
